--- a/slides/ch10/v2/ch10-workshop.pptx
+++ b/slides/ch10/v2/ch10-workshop.pptx
@@ -4782,7 +4782,7 @@
                 </a:solidFill>
                 <a:latin typeface="Calibri"/>
               </a:rPr>
-              <a:t>MKTG 4333 / CH 10 WORKSHOP</a:t>
+              <a:t>CHAPTER 10 WORKSHOP</a:t>
             </a:r>
           </a:p>
         </p:txBody>
